--- a/Docker_in_100_Seconds.pptx
+++ b/Docker_in_100_Seconds.pptx
@@ -56,12 +56,6 @@
     <p:sldId id="304" r:id="rId55"/>
     <p:sldId id="305" r:id="rId56"/>
     <p:sldId id="306" r:id="rId57"/>
-    <p:sldId id="307" r:id="rId58"/>
-    <p:sldId id="308" r:id="rId59"/>
-    <p:sldId id="309" r:id="rId60"/>
-    <p:sldId id="310" r:id="rId61"/>
-    <p:sldId id="311" r:id="rId62"/>
-    <p:sldId id="312" r:id="rId63"/>
   </p:sldIdLst>
   <p:sldSz cx="9144000" cy="6858000" type="screen4x3"/>
   <p:notesSz cx="6858000" cy="9144000"/>
@@ -3190,9 +3184,6 @@
           </a:bodyPr>
           <a:lstStyle/>
           <a:p>
-            <a:pPr>
-              <a:defRPr sz="1400" b="0"/>
-            </a:pPr>
             <a:r>
               <a:t>Docker in 100 Seconds - 00:00</a:t>
             </a:r>
@@ -3263,11 +3254,8 @@
           </a:bodyPr>
           <a:lstStyle/>
           <a:p>
-            <a:pPr>
-              <a:defRPr sz="1400" b="0"/>
-            </a:pPr>
-            <a:r>
-              <a:t>Docker in 100 Seconds - 00:09</a:t>
+            <a:r>
+              <a:t>Docker in 100 Seconds - 00:18</a:t>
             </a:r>
           </a:p>
         </p:txBody>
@@ -3336,11 +3324,8 @@
           </a:bodyPr>
           <a:lstStyle/>
           <a:p>
-            <a:pPr>
-              <a:defRPr sz="1400" b="0"/>
-            </a:pPr>
-            <a:r>
-              <a:t>Docker in 100 Seconds - 00:10</a:t>
+            <a:r>
+              <a:t>Docker in 100 Seconds - 00:20</a:t>
             </a:r>
           </a:p>
         </p:txBody>
@@ -3409,11 +3394,8 @@
           </a:bodyPr>
           <a:lstStyle/>
           <a:p>
-            <a:pPr>
-              <a:defRPr sz="1400" b="0"/>
-            </a:pPr>
-            <a:r>
-              <a:t>Docker in 100 Seconds - 00:11</a:t>
+            <a:r>
+              <a:t>Docker in 100 Seconds - 00:21</a:t>
             </a:r>
           </a:p>
         </p:txBody>
@@ -3482,11 +3464,8 @@
           </a:bodyPr>
           <a:lstStyle/>
           <a:p>
-            <a:pPr>
-              <a:defRPr sz="1400" b="0"/>
-            </a:pPr>
-            <a:r>
-              <a:t>Docker in 100 Seconds - 00:12</a:t>
+            <a:r>
+              <a:t>Docker in 100 Seconds - 00:23</a:t>
             </a:r>
           </a:p>
         </p:txBody>
@@ -3555,11 +3534,8 @@
           </a:bodyPr>
           <a:lstStyle/>
           <a:p>
-            <a:pPr>
-              <a:defRPr sz="1400" b="0"/>
-            </a:pPr>
-            <a:r>
-              <a:t>Docker in 100 Seconds - 00:13</a:t>
+            <a:r>
+              <a:t>Docker in 100 Seconds - 00:29</a:t>
             </a:r>
           </a:p>
         </p:txBody>
@@ -3628,11 +3604,8 @@
           </a:bodyPr>
           <a:lstStyle/>
           <a:p>
-            <a:pPr>
-              <a:defRPr sz="1400" b="0"/>
-            </a:pPr>
-            <a:r>
-              <a:t>Docker in 100 Seconds - 00:17</a:t>
+            <a:r>
+              <a:t>Docker in 100 Seconds - 00:31</a:t>
             </a:r>
           </a:p>
         </p:txBody>
@@ -3701,11 +3674,8 @@
           </a:bodyPr>
           <a:lstStyle/>
           <a:p>
-            <a:pPr>
-              <a:defRPr sz="1400" b="0"/>
-            </a:pPr>
-            <a:r>
-              <a:t>Docker in 100 Seconds - 00:18</a:t>
+            <a:r>
+              <a:t>Docker in 100 Seconds - 00:34</a:t>
             </a:r>
           </a:p>
         </p:txBody>
@@ -3774,11 +3744,8 @@
           </a:bodyPr>
           <a:lstStyle/>
           <a:p>
-            <a:pPr>
-              <a:defRPr sz="1400" b="0"/>
-            </a:pPr>
-            <a:r>
-              <a:t>Docker in 100 Seconds - 00:20</a:t>
+            <a:r>
+              <a:t>Docker in 100 Seconds - 00:38</a:t>
             </a:r>
           </a:p>
         </p:txBody>
@@ -3847,11 +3814,8 @@
           </a:bodyPr>
           <a:lstStyle/>
           <a:p>
-            <a:pPr>
-              <a:defRPr sz="1400" b="0"/>
-            </a:pPr>
-            <a:r>
-              <a:t>Docker in 100 Seconds - 00:21</a:t>
+            <a:r>
+              <a:t>Docker in 100 Seconds - 00:41</a:t>
             </a:r>
           </a:p>
         </p:txBody>
@@ -3920,11 +3884,8 @@
           </a:bodyPr>
           <a:lstStyle/>
           <a:p>
-            <a:pPr>
-              <a:defRPr sz="1400" b="0"/>
-            </a:pPr>
-            <a:r>
-              <a:t>Docker in 100 Seconds - 00:23</a:t>
+            <a:r>
+              <a:t>Docker in 100 Seconds - 00:46</a:t>
             </a:r>
           </a:p>
         </p:txBody>
@@ -3993,9 +3954,6 @@
           </a:bodyPr>
           <a:lstStyle/>
           <a:p>
-            <a:pPr>
-              <a:defRPr sz="1400" b="0"/>
-            </a:pPr>
             <a:r>
               <a:t>Docker in 100 Seconds - 00:01</a:t>
             </a:r>
@@ -4066,11 +4024,8 @@
           </a:bodyPr>
           <a:lstStyle/>
           <a:p>
-            <a:pPr>
-              <a:defRPr sz="1400" b="0"/>
-            </a:pPr>
-            <a:r>
-              <a:t>Docker in 100 Seconds - 00:29</a:t>
+            <a:r>
+              <a:t>Docker in 100 Seconds - 00:48</a:t>
             </a:r>
           </a:p>
         </p:txBody>
@@ -4139,11 +4094,8 @@
           </a:bodyPr>
           <a:lstStyle/>
           <a:p>
-            <a:pPr>
-              <a:defRPr sz="1400" b="0"/>
-            </a:pPr>
-            <a:r>
-              <a:t>Docker in 100 Seconds - 00:31</a:t>
+            <a:r>
+              <a:t>Docker in 100 Seconds - 00:49</a:t>
             </a:r>
           </a:p>
         </p:txBody>
@@ -4212,11 +4164,8 @@
           </a:bodyPr>
           <a:lstStyle/>
           <a:p>
-            <a:pPr>
-              <a:defRPr sz="1400" b="0"/>
-            </a:pPr>
-            <a:r>
-              <a:t>Docker in 100 Seconds - 00:34</a:t>
+            <a:r>
+              <a:t>Docker in 100 Seconds - 00:51</a:t>
             </a:r>
           </a:p>
         </p:txBody>
@@ -4285,11 +4234,8 @@
           </a:bodyPr>
           <a:lstStyle/>
           <a:p>
-            <a:pPr>
-              <a:defRPr sz="1400" b="0"/>
-            </a:pPr>
-            <a:r>
-              <a:t>Docker in 100 Seconds - 00:38</a:t>
+            <a:r>
+              <a:t>Docker in 100 Seconds - 00:53</a:t>
             </a:r>
           </a:p>
         </p:txBody>
@@ -4358,11 +4304,8 @@
           </a:bodyPr>
           <a:lstStyle/>
           <a:p>
-            <a:pPr>
-              <a:defRPr sz="1400" b="0"/>
-            </a:pPr>
-            <a:r>
-              <a:t>Docker in 100 Seconds - 00:41</a:t>
+            <a:r>
+              <a:t>Docker in 100 Seconds - 00:55</a:t>
             </a:r>
           </a:p>
         </p:txBody>
@@ -4431,11 +4374,8 @@
           </a:bodyPr>
           <a:lstStyle/>
           <a:p>
-            <a:pPr>
-              <a:defRPr sz="1400" b="0"/>
-            </a:pPr>
-            <a:r>
-              <a:t>Docker in 100 Seconds - 00:46</a:t>
+            <a:r>
+              <a:t>Docker in 100 Seconds - 00:56</a:t>
             </a:r>
           </a:p>
         </p:txBody>
@@ -4504,11 +4444,8 @@
           </a:bodyPr>
           <a:lstStyle/>
           <a:p>
-            <a:pPr>
-              <a:defRPr sz="1400" b="0"/>
-            </a:pPr>
-            <a:r>
-              <a:t>Docker in 100 Seconds - 00:48</a:t>
+            <a:r>
+              <a:t>Docker in 100 Seconds - 00:57</a:t>
             </a:r>
           </a:p>
         </p:txBody>
@@ -4577,11 +4514,8 @@
           </a:bodyPr>
           <a:lstStyle/>
           <a:p>
-            <a:pPr>
-              <a:defRPr sz="1400" b="0"/>
-            </a:pPr>
-            <a:r>
-              <a:t>Docker in 100 Seconds - 00:49</a:t>
+            <a:r>
+              <a:t>Docker in 100 Seconds - 00:58</a:t>
             </a:r>
           </a:p>
         </p:txBody>
@@ -4650,11 +4584,8 @@
           </a:bodyPr>
           <a:lstStyle/>
           <a:p>
-            <a:pPr>
-              <a:defRPr sz="1400" b="0"/>
-            </a:pPr>
-            <a:r>
-              <a:t>Docker in 100 Seconds - 00:51</a:t>
+            <a:r>
+              <a:t>Docker in 100 Seconds - 00:59</a:t>
             </a:r>
           </a:p>
         </p:txBody>
@@ -4723,11 +4654,8 @@
           </a:bodyPr>
           <a:lstStyle/>
           <a:p>
-            <a:pPr>
-              <a:defRPr sz="1400" b="0"/>
-            </a:pPr>
-            <a:r>
-              <a:t>Docker in 100 Seconds - 00:53</a:t>
+            <a:r>
+              <a:t>Docker in 100 Seconds - 01:00</a:t>
             </a:r>
           </a:p>
         </p:txBody>
@@ -4752,7 +4680,7 @@
       <p:grpSpPr/>
       <p:pic>
         <p:nvPicPr>
-          <p:cNvPr id="2" name="Picture 1" descr="image.jpg"/>
+          <p:cNvPr id="2" name="Picture 1" descr="image.gif"/>
           <p:cNvPicPr>
             <a:picLocks noChangeAspect="1"/>
           </p:cNvPicPr>
@@ -4766,45 +4694,14 @@
         </p:blipFill>
         <p:spPr>
           <a:xfrm>
-            <a:off x="1523999" y="1371600"/>
-            <a:ext cx="6096000" cy="3429000"/>
+            <a:off x="914400" y="914400"/>
+            <a:ext cx="7315200" cy="5486400"/>
           </a:xfrm>
           <a:prstGeom prst="rect">
             <a:avLst/>
           </a:prstGeom>
         </p:spPr>
       </p:pic>
-      <p:sp>
-        <p:nvSpPr>
-          <p:cNvPr id="3" name="TextBox 2"/>
-          <p:cNvSpPr txBox="1"/>
-          <p:nvPr/>
-        </p:nvSpPr>
-        <p:spPr>
-          <a:xfrm>
-            <a:off x="914400" y="5943600"/>
-            <a:ext cx="7315200" cy="914400"/>
-          </a:xfrm>
-          <a:prstGeom prst="rect">
-            <a:avLst/>
-          </a:prstGeom>
-          <a:noFill/>
-        </p:spPr>
-        <p:txBody>
-          <a:bodyPr wrap="none">
-            <a:spAutoFit/>
-          </a:bodyPr>
-          <a:lstStyle/>
-          <a:p>
-            <a:pPr>
-              <a:defRPr sz="1400" b="0"/>
-            </a:pPr>
-            <a:r>
-              <a:t>Docker in 100 Seconds - 00:02</a:t>
-            </a:r>
-          </a:p>
-        </p:txBody>
-      </p:sp>
     </p:spTree>
   </p:cSld>
   <p:clrMapOvr>
@@ -4869,11 +4766,8 @@
           </a:bodyPr>
           <a:lstStyle/>
           <a:p>
-            <a:pPr>
-              <a:defRPr sz="1400" b="0"/>
-            </a:pPr>
-            <a:r>
-              <a:t>Docker in 100 Seconds - 00:55</a:t>
+            <a:r>
+              <a:t>Docker in 100 Seconds - 01:05</a:t>
             </a:r>
           </a:p>
         </p:txBody>
@@ -4942,11 +4836,8 @@
           </a:bodyPr>
           <a:lstStyle/>
           <a:p>
-            <a:pPr>
-              <a:defRPr sz="1400" b="0"/>
-            </a:pPr>
-            <a:r>
-              <a:t>Docker in 100 Seconds - 00:56</a:t>
+            <a:r>
+              <a:t>Docker in 100 Seconds - 01:06</a:t>
             </a:r>
           </a:p>
         </p:txBody>
@@ -5015,11 +4906,8 @@
           </a:bodyPr>
           <a:lstStyle/>
           <a:p>
-            <a:pPr>
-              <a:defRPr sz="1400" b="0"/>
-            </a:pPr>
-            <a:r>
-              <a:t>Docker in 100 Seconds - 00:57</a:t>
+            <a:r>
+              <a:t>Docker in 100 Seconds - 01:11</a:t>
             </a:r>
           </a:p>
         </p:txBody>
@@ -5088,11 +4976,8 @@
           </a:bodyPr>
           <a:lstStyle/>
           <a:p>
-            <a:pPr>
-              <a:defRPr sz="1400" b="0"/>
-            </a:pPr>
-            <a:r>
-              <a:t>Docker in 100 Seconds - 00:58</a:t>
+            <a:r>
+              <a:t>Docker in 100 Seconds - 01:16</a:t>
             </a:r>
           </a:p>
         </p:txBody>
@@ -5161,11 +5046,8 @@
           </a:bodyPr>
           <a:lstStyle/>
           <a:p>
-            <a:pPr>
-              <a:defRPr sz="1400" b="0"/>
-            </a:pPr>
-            <a:r>
-              <a:t>Docker in 100 Seconds - 00:59</a:t>
+            <a:r>
+              <a:t>Docker in 100 Seconds - 01:21</a:t>
             </a:r>
           </a:p>
         </p:txBody>
@@ -5234,11 +5116,8 @@
           </a:bodyPr>
           <a:lstStyle/>
           <a:p>
-            <a:pPr>
-              <a:defRPr sz="1400" b="0"/>
-            </a:pPr>
-            <a:r>
-              <a:t>Docker in 100 Seconds - 01:00</a:t>
+            <a:r>
+              <a:t>Docker in 100 Seconds - 01:34</a:t>
             </a:r>
           </a:p>
         </p:txBody>
@@ -5307,11 +5186,8 @@
           </a:bodyPr>
           <a:lstStyle/>
           <a:p>
-            <a:pPr>
-              <a:defRPr sz="1400" b="0"/>
-            </a:pPr>
-            <a:r>
-              <a:t>Docker in 100 Seconds - 01:05</a:t>
+            <a:r>
+              <a:t>Docker in 100 Seconds - 01:36</a:t>
             </a:r>
           </a:p>
         </p:txBody>
@@ -5380,11 +5256,8 @@
           </a:bodyPr>
           <a:lstStyle/>
           <a:p>
-            <a:pPr>
-              <a:defRPr sz="1400" b="0"/>
-            </a:pPr>
-            <a:r>
-              <a:t>Docker in 100 Seconds - 01:06</a:t>
+            <a:r>
+              <a:t>Docker in 100 Seconds - 01:37</a:t>
             </a:r>
           </a:p>
         </p:txBody>
@@ -5453,11 +5326,8 @@
           </a:bodyPr>
           <a:lstStyle/>
           <a:p>
-            <a:pPr>
-              <a:defRPr sz="1400" b="0"/>
-            </a:pPr>
-            <a:r>
-              <a:t>Docker in 100 Seconds - 01:11</a:t>
+            <a:r>
+              <a:t>Docker in 100 Seconds - 01:42</a:t>
             </a:r>
           </a:p>
         </p:txBody>
@@ -5526,11 +5396,8 @@
           </a:bodyPr>
           <a:lstStyle/>
           <a:p>
-            <a:pPr>
-              <a:defRPr sz="1400" b="0"/>
-            </a:pPr>
-            <a:r>
-              <a:t>Docker in 100 Seconds - 01:16</a:t>
+            <a:r>
+              <a:t>Docker in 100 Seconds - 01:43</a:t>
             </a:r>
           </a:p>
         </p:txBody>
@@ -5555,7 +5422,7 @@
       <p:grpSpPr/>
       <p:pic>
         <p:nvPicPr>
-          <p:cNvPr id="2" name="Picture 1" descr="image.jpg"/>
+          <p:cNvPr id="2" name="Picture 1" descr="image.png"/>
           <p:cNvPicPr>
             <a:picLocks noChangeAspect="1"/>
           </p:cNvPicPr>
@@ -5569,45 +5436,14 @@
         </p:blipFill>
         <p:spPr>
           <a:xfrm>
-            <a:off x="1523999" y="1371600"/>
-            <a:ext cx="6096000" cy="3429000"/>
+            <a:off x="914400" y="914400"/>
+            <a:ext cx="7315200" cy="5486400"/>
           </a:xfrm>
           <a:prstGeom prst="rect">
             <a:avLst/>
           </a:prstGeom>
         </p:spPr>
       </p:pic>
-      <p:sp>
-        <p:nvSpPr>
-          <p:cNvPr id="3" name="TextBox 2"/>
-          <p:cNvSpPr txBox="1"/>
-          <p:nvPr/>
-        </p:nvSpPr>
-        <p:spPr>
-          <a:xfrm>
-            <a:off x="914400" y="5943600"/>
-            <a:ext cx="7315200" cy="914400"/>
-          </a:xfrm>
-          <a:prstGeom prst="rect">
-            <a:avLst/>
-          </a:prstGeom>
-          <a:noFill/>
-        </p:spPr>
-        <p:txBody>
-          <a:bodyPr wrap="none">
-            <a:spAutoFit/>
-          </a:bodyPr>
-          <a:lstStyle/>
-          <a:p>
-            <a:pPr>
-              <a:defRPr sz="1400" b="0"/>
-            </a:pPr>
-            <a:r>
-              <a:t>Docker in 100 Seconds - 00:03</a:t>
-            </a:r>
-          </a:p>
-        </p:txBody>
-      </p:sp>
     </p:spTree>
   </p:cSld>
   <p:clrMapOvr>
@@ -5672,11 +5508,8 @@
           </a:bodyPr>
           <a:lstStyle/>
           <a:p>
-            <a:pPr>
-              <a:defRPr sz="1400" b="0"/>
-            </a:pPr>
-            <a:r>
-              <a:t>Docker in 100 Seconds - 01:21</a:t>
+            <a:r>
+              <a:t>Docker in 100 Seconds - 01:45</a:t>
             </a:r>
           </a:p>
         </p:txBody>
@@ -5745,11 +5578,8 @@
           </a:bodyPr>
           <a:lstStyle/>
           <a:p>
-            <a:pPr>
-              <a:defRPr sz="1400" b="0"/>
-            </a:pPr>
-            <a:r>
-              <a:t>Docker in 100 Seconds - 01:34</a:t>
+            <a:r>
+              <a:t>Docker in 100 Seconds - 01:48</a:t>
             </a:r>
           </a:p>
         </p:txBody>
@@ -5818,11 +5648,8 @@
           </a:bodyPr>
           <a:lstStyle/>
           <a:p>
-            <a:pPr>
-              <a:defRPr sz="1400" b="0"/>
-            </a:pPr>
-            <a:r>
-              <a:t>Docker in 100 Seconds - 01:36</a:t>
+            <a:r>
+              <a:t>Docker in 100 Seconds - 01:52</a:t>
             </a:r>
           </a:p>
         </p:txBody>
@@ -5891,11 +5718,8 @@
           </a:bodyPr>
           <a:lstStyle/>
           <a:p>
-            <a:pPr>
-              <a:defRPr sz="1400" b="0"/>
-            </a:pPr>
-            <a:r>
-              <a:t>Docker in 100 Seconds - 01:37</a:t>
+            <a:r>
+              <a:t>Docker in 100 Seconds - 01:53</a:t>
             </a:r>
           </a:p>
         </p:txBody>
@@ -5964,11 +5788,8 @@
           </a:bodyPr>
           <a:lstStyle/>
           <a:p>
-            <a:pPr>
-              <a:defRPr sz="1400" b="0"/>
-            </a:pPr>
-            <a:r>
-              <a:t>Docker in 100 Seconds - 01:42</a:t>
+            <a:r>
+              <a:t>Docker in 100 Seconds - 01:54</a:t>
             </a:r>
           </a:p>
         </p:txBody>
@@ -6037,11 +5858,8 @@
           </a:bodyPr>
           <a:lstStyle/>
           <a:p>
-            <a:pPr>
-              <a:defRPr sz="1400" b="0"/>
-            </a:pPr>
-            <a:r>
-              <a:t>Docker in 100 Seconds - 01:43</a:t>
+            <a:r>
+              <a:t>Docker in 100 Seconds - 01:55</a:t>
             </a:r>
           </a:p>
         </p:txBody>
@@ -6110,11 +5928,8 @@
           </a:bodyPr>
           <a:lstStyle/>
           <a:p>
-            <a:pPr>
-              <a:defRPr sz="1400" b="0"/>
-            </a:pPr>
-            <a:r>
-              <a:t>Docker in 100 Seconds - 01:45</a:t>
+            <a:r>
+              <a:t>Docker in 100 Seconds - 01:56</a:t>
             </a:r>
           </a:p>
         </p:txBody>
@@ -6183,11 +5998,8 @@
           </a:bodyPr>
           <a:lstStyle/>
           <a:p>
-            <a:pPr>
-              <a:defRPr sz="1400" b="0"/>
-            </a:pPr>
-            <a:r>
-              <a:t>Docker in 100 Seconds - 01:48</a:t>
+            <a:r>
+              <a:t>Docker in 100 Seconds - 01:57</a:t>
             </a:r>
           </a:p>
         </p:txBody>
@@ -6256,11 +6068,8 @@
           </a:bodyPr>
           <a:lstStyle/>
           <a:p>
-            <a:pPr>
-              <a:defRPr sz="1400" b="0"/>
-            </a:pPr>
-            <a:r>
-              <a:t>Docker in 100 Seconds - 01:52</a:t>
+            <a:r>
+              <a:t>Docker in 100 Seconds - 02:00</a:t>
             </a:r>
           </a:p>
         </p:txBody>
@@ -6329,11 +6138,8 @@
           </a:bodyPr>
           <a:lstStyle/>
           <a:p>
-            <a:pPr>
-              <a:defRPr sz="1400" b="0"/>
-            </a:pPr>
-            <a:r>
-              <a:t>Docker in 100 Seconds - 01:53</a:t>
+            <a:r>
+              <a:t>Docker in 100 Seconds - 02:01</a:t>
             </a:r>
           </a:p>
         </p:txBody>
@@ -6402,11 +6208,8 @@
           </a:bodyPr>
           <a:lstStyle/>
           <a:p>
-            <a:pPr>
-              <a:defRPr sz="1400" b="0"/>
-            </a:pPr>
-            <a:r>
-              <a:t>Docker in 100 Seconds - 00:04</a:t>
+            <a:r>
+              <a:t>Docker in 100 Seconds - 00:10</a:t>
             </a:r>
           </a:p>
         </p:txBody>
@@ -6475,11 +6278,8 @@
           </a:bodyPr>
           <a:lstStyle/>
           <a:p>
-            <a:pPr>
-              <a:defRPr sz="1400" b="0"/>
-            </a:pPr>
-            <a:r>
-              <a:t>Docker in 100 Seconds - 01:54</a:t>
+            <a:r>
+              <a:t>Docker in 100 Seconds - 02:03</a:t>
             </a:r>
           </a:p>
         </p:txBody>
@@ -6548,447 +6348,6 @@
           </a:bodyPr>
           <a:lstStyle/>
           <a:p>
-            <a:pPr>
-              <a:defRPr sz="1400" b="0"/>
-            </a:pPr>
-            <a:r>
-              <a:t>Docker in 100 Seconds - 01:55</a:t>
-            </a:r>
-          </a:p>
-        </p:txBody>
-      </p:sp>
-    </p:spTree>
-  </p:cSld>
-  <p:clrMapOvr>
-    <a:masterClrMapping/>
-  </p:clrMapOvr>
-</p:sld>
-</file>
-
-<file path=ppt/slides/slide52.xml><?xml version="1.0" encoding="utf-8"?>
-<p:sld xmlns:a="http://schemas.openxmlformats.org/drawingml/2006/main" xmlns:p="http://schemas.openxmlformats.org/presentationml/2006/main" xmlns:r="http://schemas.openxmlformats.org/officeDocument/2006/relationships">
-  <p:cSld>
-    <p:spTree>
-      <p:nvGrpSpPr>
-        <p:cNvPr id="1" name=""/>
-        <p:cNvGrpSpPr/>
-        <p:nvPr/>
-      </p:nvGrpSpPr>
-      <p:grpSpPr/>
-      <p:pic>
-        <p:nvPicPr>
-          <p:cNvPr id="2" name="Picture 1" descr="image.jpg"/>
-          <p:cNvPicPr>
-            <a:picLocks noChangeAspect="1"/>
-          </p:cNvPicPr>
-          <p:nvPr/>
-        </p:nvPicPr>
-        <p:blipFill>
-          <a:blip r:embed="rId2"/>
-          <a:stretch>
-            <a:fillRect/>
-          </a:stretch>
-        </p:blipFill>
-        <p:spPr>
-          <a:xfrm>
-            <a:off x="1523999" y="1371600"/>
-            <a:ext cx="6096000" cy="3429000"/>
-          </a:xfrm>
-          <a:prstGeom prst="rect">
-            <a:avLst/>
-          </a:prstGeom>
-        </p:spPr>
-      </p:pic>
-      <p:sp>
-        <p:nvSpPr>
-          <p:cNvPr id="3" name="TextBox 2"/>
-          <p:cNvSpPr txBox="1"/>
-          <p:nvPr/>
-        </p:nvSpPr>
-        <p:spPr>
-          <a:xfrm>
-            <a:off x="914400" y="5943600"/>
-            <a:ext cx="7315200" cy="914400"/>
-          </a:xfrm>
-          <a:prstGeom prst="rect">
-            <a:avLst/>
-          </a:prstGeom>
-          <a:noFill/>
-        </p:spPr>
-        <p:txBody>
-          <a:bodyPr wrap="none">
-            <a:spAutoFit/>
-          </a:bodyPr>
-          <a:lstStyle/>
-          <a:p>
-            <a:pPr>
-              <a:defRPr sz="1400" b="0"/>
-            </a:pPr>
-            <a:r>
-              <a:t>Docker in 100 Seconds - 01:56</a:t>
-            </a:r>
-          </a:p>
-        </p:txBody>
-      </p:sp>
-    </p:spTree>
-  </p:cSld>
-  <p:clrMapOvr>
-    <a:masterClrMapping/>
-  </p:clrMapOvr>
-</p:sld>
-</file>
-
-<file path=ppt/slides/slide53.xml><?xml version="1.0" encoding="utf-8"?>
-<p:sld xmlns:a="http://schemas.openxmlformats.org/drawingml/2006/main" xmlns:p="http://schemas.openxmlformats.org/presentationml/2006/main" xmlns:r="http://schemas.openxmlformats.org/officeDocument/2006/relationships">
-  <p:cSld>
-    <p:spTree>
-      <p:nvGrpSpPr>
-        <p:cNvPr id="1" name=""/>
-        <p:cNvGrpSpPr/>
-        <p:nvPr/>
-      </p:nvGrpSpPr>
-      <p:grpSpPr/>
-      <p:pic>
-        <p:nvPicPr>
-          <p:cNvPr id="2" name="Picture 1" descr="image.jpg"/>
-          <p:cNvPicPr>
-            <a:picLocks noChangeAspect="1"/>
-          </p:cNvPicPr>
-          <p:nvPr/>
-        </p:nvPicPr>
-        <p:blipFill>
-          <a:blip r:embed="rId2"/>
-          <a:stretch>
-            <a:fillRect/>
-          </a:stretch>
-        </p:blipFill>
-        <p:spPr>
-          <a:xfrm>
-            <a:off x="1523999" y="1371600"/>
-            <a:ext cx="6096000" cy="3429000"/>
-          </a:xfrm>
-          <a:prstGeom prst="rect">
-            <a:avLst/>
-          </a:prstGeom>
-        </p:spPr>
-      </p:pic>
-      <p:sp>
-        <p:nvSpPr>
-          <p:cNvPr id="3" name="TextBox 2"/>
-          <p:cNvSpPr txBox="1"/>
-          <p:nvPr/>
-        </p:nvSpPr>
-        <p:spPr>
-          <a:xfrm>
-            <a:off x="914400" y="5943600"/>
-            <a:ext cx="7315200" cy="914400"/>
-          </a:xfrm>
-          <a:prstGeom prst="rect">
-            <a:avLst/>
-          </a:prstGeom>
-          <a:noFill/>
-        </p:spPr>
-        <p:txBody>
-          <a:bodyPr wrap="none">
-            <a:spAutoFit/>
-          </a:bodyPr>
-          <a:lstStyle/>
-          <a:p>
-            <a:pPr>
-              <a:defRPr sz="1400" b="0"/>
-            </a:pPr>
-            <a:r>
-              <a:t>Docker in 100 Seconds - 01:57</a:t>
-            </a:r>
-          </a:p>
-        </p:txBody>
-      </p:sp>
-    </p:spTree>
-  </p:cSld>
-  <p:clrMapOvr>
-    <a:masterClrMapping/>
-  </p:clrMapOvr>
-</p:sld>
-</file>
-
-<file path=ppt/slides/slide54.xml><?xml version="1.0" encoding="utf-8"?>
-<p:sld xmlns:a="http://schemas.openxmlformats.org/drawingml/2006/main" xmlns:p="http://schemas.openxmlformats.org/presentationml/2006/main" xmlns:r="http://schemas.openxmlformats.org/officeDocument/2006/relationships">
-  <p:cSld>
-    <p:spTree>
-      <p:nvGrpSpPr>
-        <p:cNvPr id="1" name=""/>
-        <p:cNvGrpSpPr/>
-        <p:nvPr/>
-      </p:nvGrpSpPr>
-      <p:grpSpPr/>
-      <p:pic>
-        <p:nvPicPr>
-          <p:cNvPr id="2" name="Picture 1" descr="image.jpg"/>
-          <p:cNvPicPr>
-            <a:picLocks noChangeAspect="1"/>
-          </p:cNvPicPr>
-          <p:nvPr/>
-        </p:nvPicPr>
-        <p:blipFill>
-          <a:blip r:embed="rId2"/>
-          <a:stretch>
-            <a:fillRect/>
-          </a:stretch>
-        </p:blipFill>
-        <p:spPr>
-          <a:xfrm>
-            <a:off x="1523999" y="1371600"/>
-            <a:ext cx="6096000" cy="3429000"/>
-          </a:xfrm>
-          <a:prstGeom prst="rect">
-            <a:avLst/>
-          </a:prstGeom>
-        </p:spPr>
-      </p:pic>
-      <p:sp>
-        <p:nvSpPr>
-          <p:cNvPr id="3" name="TextBox 2"/>
-          <p:cNvSpPr txBox="1"/>
-          <p:nvPr/>
-        </p:nvSpPr>
-        <p:spPr>
-          <a:xfrm>
-            <a:off x="914400" y="5943600"/>
-            <a:ext cx="7315200" cy="914400"/>
-          </a:xfrm>
-          <a:prstGeom prst="rect">
-            <a:avLst/>
-          </a:prstGeom>
-          <a:noFill/>
-        </p:spPr>
-        <p:txBody>
-          <a:bodyPr wrap="none">
-            <a:spAutoFit/>
-          </a:bodyPr>
-          <a:lstStyle/>
-          <a:p>
-            <a:pPr>
-              <a:defRPr sz="1400" b="0"/>
-            </a:pPr>
-            <a:r>
-              <a:t>Docker in 100 Seconds - 02:00</a:t>
-            </a:r>
-          </a:p>
-        </p:txBody>
-      </p:sp>
-    </p:spTree>
-  </p:cSld>
-  <p:clrMapOvr>
-    <a:masterClrMapping/>
-  </p:clrMapOvr>
-</p:sld>
-</file>
-
-<file path=ppt/slides/slide55.xml><?xml version="1.0" encoding="utf-8"?>
-<p:sld xmlns:a="http://schemas.openxmlformats.org/drawingml/2006/main" xmlns:p="http://schemas.openxmlformats.org/presentationml/2006/main" xmlns:r="http://schemas.openxmlformats.org/officeDocument/2006/relationships">
-  <p:cSld>
-    <p:spTree>
-      <p:nvGrpSpPr>
-        <p:cNvPr id="1" name=""/>
-        <p:cNvGrpSpPr/>
-        <p:nvPr/>
-      </p:nvGrpSpPr>
-      <p:grpSpPr/>
-      <p:pic>
-        <p:nvPicPr>
-          <p:cNvPr id="2" name="Picture 1" descr="image.jpg"/>
-          <p:cNvPicPr>
-            <a:picLocks noChangeAspect="1"/>
-          </p:cNvPicPr>
-          <p:nvPr/>
-        </p:nvPicPr>
-        <p:blipFill>
-          <a:blip r:embed="rId2"/>
-          <a:stretch>
-            <a:fillRect/>
-          </a:stretch>
-        </p:blipFill>
-        <p:spPr>
-          <a:xfrm>
-            <a:off x="1523999" y="1371600"/>
-            <a:ext cx="6096000" cy="3429000"/>
-          </a:xfrm>
-          <a:prstGeom prst="rect">
-            <a:avLst/>
-          </a:prstGeom>
-        </p:spPr>
-      </p:pic>
-      <p:sp>
-        <p:nvSpPr>
-          <p:cNvPr id="3" name="TextBox 2"/>
-          <p:cNvSpPr txBox="1"/>
-          <p:nvPr/>
-        </p:nvSpPr>
-        <p:spPr>
-          <a:xfrm>
-            <a:off x="914400" y="5943600"/>
-            <a:ext cx="7315200" cy="914400"/>
-          </a:xfrm>
-          <a:prstGeom prst="rect">
-            <a:avLst/>
-          </a:prstGeom>
-          <a:noFill/>
-        </p:spPr>
-        <p:txBody>
-          <a:bodyPr wrap="none">
-            <a:spAutoFit/>
-          </a:bodyPr>
-          <a:lstStyle/>
-          <a:p>
-            <a:pPr>
-              <a:defRPr sz="1400" b="0"/>
-            </a:pPr>
-            <a:r>
-              <a:t>Docker in 100 Seconds - 02:01</a:t>
-            </a:r>
-          </a:p>
-        </p:txBody>
-      </p:sp>
-    </p:spTree>
-  </p:cSld>
-  <p:clrMapOvr>
-    <a:masterClrMapping/>
-  </p:clrMapOvr>
-</p:sld>
-</file>
-
-<file path=ppt/slides/slide56.xml><?xml version="1.0" encoding="utf-8"?>
-<p:sld xmlns:a="http://schemas.openxmlformats.org/drawingml/2006/main" xmlns:p="http://schemas.openxmlformats.org/presentationml/2006/main" xmlns:r="http://schemas.openxmlformats.org/officeDocument/2006/relationships">
-  <p:cSld>
-    <p:spTree>
-      <p:nvGrpSpPr>
-        <p:cNvPr id="1" name=""/>
-        <p:cNvGrpSpPr/>
-        <p:nvPr/>
-      </p:nvGrpSpPr>
-      <p:grpSpPr/>
-      <p:pic>
-        <p:nvPicPr>
-          <p:cNvPr id="2" name="Picture 1" descr="image.jpg"/>
-          <p:cNvPicPr>
-            <a:picLocks noChangeAspect="1"/>
-          </p:cNvPicPr>
-          <p:nvPr/>
-        </p:nvPicPr>
-        <p:blipFill>
-          <a:blip r:embed="rId2"/>
-          <a:stretch>
-            <a:fillRect/>
-          </a:stretch>
-        </p:blipFill>
-        <p:spPr>
-          <a:xfrm>
-            <a:off x="1523999" y="1371600"/>
-            <a:ext cx="6096000" cy="3429000"/>
-          </a:xfrm>
-          <a:prstGeom prst="rect">
-            <a:avLst/>
-          </a:prstGeom>
-        </p:spPr>
-      </p:pic>
-      <p:sp>
-        <p:nvSpPr>
-          <p:cNvPr id="3" name="TextBox 2"/>
-          <p:cNvSpPr txBox="1"/>
-          <p:nvPr/>
-        </p:nvSpPr>
-        <p:spPr>
-          <a:xfrm>
-            <a:off x="914400" y="5943600"/>
-            <a:ext cx="7315200" cy="914400"/>
-          </a:xfrm>
-          <a:prstGeom prst="rect">
-            <a:avLst/>
-          </a:prstGeom>
-          <a:noFill/>
-        </p:spPr>
-        <p:txBody>
-          <a:bodyPr wrap="none">
-            <a:spAutoFit/>
-          </a:bodyPr>
-          <a:lstStyle/>
-          <a:p>
-            <a:pPr>
-              <a:defRPr sz="1400" b="0"/>
-            </a:pPr>
-            <a:r>
-              <a:t>Docker in 100 Seconds - 02:03</a:t>
-            </a:r>
-          </a:p>
-        </p:txBody>
-      </p:sp>
-    </p:spTree>
-  </p:cSld>
-  <p:clrMapOvr>
-    <a:masterClrMapping/>
-  </p:clrMapOvr>
-</p:sld>
-</file>
-
-<file path=ppt/slides/slide57.xml><?xml version="1.0" encoding="utf-8"?>
-<p:sld xmlns:a="http://schemas.openxmlformats.org/drawingml/2006/main" xmlns:p="http://schemas.openxmlformats.org/presentationml/2006/main" xmlns:r="http://schemas.openxmlformats.org/officeDocument/2006/relationships">
-  <p:cSld>
-    <p:spTree>
-      <p:nvGrpSpPr>
-        <p:cNvPr id="1" name=""/>
-        <p:cNvGrpSpPr/>
-        <p:nvPr/>
-      </p:nvGrpSpPr>
-      <p:grpSpPr/>
-      <p:pic>
-        <p:nvPicPr>
-          <p:cNvPr id="2" name="Picture 1" descr="image.jpg"/>
-          <p:cNvPicPr>
-            <a:picLocks noChangeAspect="1"/>
-          </p:cNvPicPr>
-          <p:nvPr/>
-        </p:nvPicPr>
-        <p:blipFill>
-          <a:blip r:embed="rId2"/>
-          <a:stretch>
-            <a:fillRect/>
-          </a:stretch>
-        </p:blipFill>
-        <p:spPr>
-          <a:xfrm>
-            <a:off x="1523999" y="1371600"/>
-            <a:ext cx="6096000" cy="3429000"/>
-          </a:xfrm>
-          <a:prstGeom prst="rect">
-            <a:avLst/>
-          </a:prstGeom>
-        </p:spPr>
-      </p:pic>
-      <p:sp>
-        <p:nvSpPr>
-          <p:cNvPr id="3" name="TextBox 2"/>
-          <p:cNvSpPr txBox="1"/>
-          <p:nvPr/>
-        </p:nvSpPr>
-        <p:spPr>
-          <a:xfrm>
-            <a:off x="914400" y="5943600"/>
-            <a:ext cx="7315200" cy="914400"/>
-          </a:xfrm>
-          <a:prstGeom prst="rect">
-            <a:avLst/>
-          </a:prstGeom>
-          <a:noFill/>
-        </p:spPr>
-        <p:txBody>
-          <a:bodyPr wrap="none">
-            <a:spAutoFit/>
-          </a:bodyPr>
-          <a:lstStyle/>
-          <a:p>
-            <a:pPr>
-              <a:defRPr sz="1400" b="0"/>
-            </a:pPr>
             <a:r>
               <a:t>Docker in 100 Seconds - 02:04</a:t>
             </a:r>
@@ -7059,11 +6418,8 @@
           </a:bodyPr>
           <a:lstStyle/>
           <a:p>
-            <a:pPr>
-              <a:defRPr sz="1400" b="0"/>
-            </a:pPr>
-            <a:r>
-              <a:t>Docker in 100 Seconds - 00:05</a:t>
+            <a:r>
+              <a:t>Docker in 100 Seconds - 00:11</a:t>
             </a:r>
           </a:p>
         </p:txBody>
@@ -7132,11 +6488,8 @@
           </a:bodyPr>
           <a:lstStyle/>
           <a:p>
-            <a:pPr>
-              <a:defRPr sz="1400" b="0"/>
-            </a:pPr>
-            <a:r>
-              <a:t>Docker in 100 Seconds - 00:06</a:t>
+            <a:r>
+              <a:t>Docker in 100 Seconds - 00:12</a:t>
             </a:r>
           </a:p>
         </p:txBody>
@@ -7205,11 +6558,8 @@
           </a:bodyPr>
           <a:lstStyle/>
           <a:p>
-            <a:pPr>
-              <a:defRPr sz="1400" b="0"/>
-            </a:pPr>
-            <a:r>
-              <a:t>Docker in 100 Seconds - 00:07</a:t>
+            <a:r>
+              <a:t>Docker in 100 Seconds - 00:13</a:t>
             </a:r>
           </a:p>
         </p:txBody>
@@ -7278,11 +6628,8 @@
           </a:bodyPr>
           <a:lstStyle/>
           <a:p>
-            <a:pPr>
-              <a:defRPr sz="1400" b="0"/>
-            </a:pPr>
-            <a:r>
-              <a:t>Docker in 100 Seconds - 00:08</a:t>
+            <a:r>
+              <a:t>Docker in 100 Seconds - 00:17</a:t>
             </a:r>
           </a:p>
         </p:txBody>
